--- a/docs/presentation/Inventory_Management_First_Review_Short.pptx
+++ b/docs/presentation/Inventory_Management_First_Review_Short.pptx
@@ -116,36 +116,36 @@
   <p:extLst>
     <p:ext uri="{521415D9-36F7-43E2-AB2F-B90AF26B5E84}">
       <p14:sectionLst xmlns:p14="http://schemas.microsoft.com/office/powerpoint/2010/main">
-        <p14:section name="Cover" id="{2ced3f90-8d18-db71-71f4-a86f8797a1e8}">
+        <p14:section name="Cover" id="{206758e6-1ffe-8f85-795e-bd75c4162dfc}">
           <p14:sldIdLst>
             <p14:sldId id="256"/>
           </p14:sldIdLst>
         </p14:section>
-        <p14:section name="Overview" id="{f3028101-4cc6-4b9f-1049-718c5d6c3dce}">
+        <p14:section name="Overview" id="{11014bdb-6889-5b4e-ff3b-03cdb6565db6}">
           <p14:sldIdLst>
             <p14:sldId id="257"/>
           </p14:sldIdLst>
         </p14:section>
-        <p14:section name="The project" id="{05fbd220-89bf-470d-ceec-6d70873bba9c}">
+        <p14:section name="The project" id="{d493dca1-2be3-ca75-1b28-10d69dfec30a}">
           <p14:sldIdLst>
             <p14:sldId id="258"/>
             <p14:sldId id="259"/>
             <p14:sldId id="260"/>
           </p14:sldIdLst>
         </p14:section>
-        <p14:section name="Research" id="{ab2bf5be-b23a-2c5f-d52f-0863a66cdc13}">
+        <p14:section name="Research" id="{5953f7b2-42d4-764c-b069-4e461bad485f}">
           <p14:sldIdLst>
             <p14:sldId id="261"/>
           </p14:sldIdLst>
         </p14:section>
-        <p14:section name="Approach" id="{f758dec3-cfc8-de8b-45f7-f91cf8c6bf8e}">
+        <p14:section name="Approach" id="{d7584084-146d-054d-b359-d6ddaba279ae}">
           <p14:sldIdLst>
             <p14:sldId id="262"/>
             <p14:sldId id="263"/>
             <p14:sldId id="264"/>
           </p14:sldIdLst>
         </p14:section>
-        <p14:section name="Close" id="{ed550592-4746-3491-573b-14375c7b58ba}">
+        <p14:section name="Close" id="{ee30dab3-0d2d-7a18-8cad-7698d44bfdf5}">
           <p14:sldIdLst>
             <p14:sldId id="265"/>
           </p14:sldIdLst>
@@ -10915,7 +10915,7 @@
                   <a:schemeClr val="tx1"/>
                 </a:solidFill>
               </a:rPr>
-              <a:t>Holt-Winters smoothing: level, trend and a weekly season</a:t>
+              <a:t>Learns each product’s trend and weekly pattern</a:t>
             </a:r>
             <a:endParaRPr lang="en-US" sz="1200" dirty="0"/>
           </a:p>
@@ -10933,7 +10933,7 @@
                   <a:schemeClr val="tx1"/>
                 </a:solidFill>
               </a:rPr>
-              <a:t>Festival uplift for Diwali, Ganesh Chaturthi, Eid</a:t>
+              <a:t>Plans for festivals like Diwali and Eid</a:t>
             </a:r>
             <a:endParaRPr lang="en-US" sz="1200" dirty="0"/>
           </a:p>
@@ -10951,7 +10951,7 @@
                   <a:schemeClr val="tx1"/>
                 </a:solidFill>
               </a:rPr>
-              <a:t>Accuracy measured with MAPE</a:t>
+              <a:t>Checks its accuracy against real sales</a:t>
             </a:r>
             <a:endParaRPr lang="en-US" sz="1200" dirty="0"/>
           </a:p>
@@ -11012,7 +11012,7 @@
                 <a:ea typeface="Cambria" pitchFamily="34" charset="-122"/>
                 <a:cs typeface="Cambria" pitchFamily="34" charset="-120"/>
               </a:rPr>
-              <a:t>ŷ(t+h) = ℓ(t) + h·b(t) + s(t+h−m)</a:t>
+              <a:t>Predicts what each item will sell</a:t>
             </a:r>
             <a:endParaRPr lang="en-US" sz="1200" dirty="0"/>
           </a:p>
@@ -11214,7 +11214,7 @@
                   <a:schemeClr val="tx1"/>
                 </a:solidFill>
               </a:rPr>
-              <a:t>Demand over the supplier’s lead time L</a:t>
+              <a:t>Expected sales until the supplier delivers</a:t>
             </a:r>
             <a:endParaRPr lang="en-US" sz="1200" dirty="0"/>
           </a:p>
@@ -11232,7 +11232,7 @@
                   <a:schemeClr val="tx1"/>
                 </a:solidFill>
               </a:rPr>
-              <a:t>Safety stock = z × σ × √L, z = 1.65 for 95%</a:t>
+              <a:t>Keeps a safety buffer for busy days</a:t>
             </a:r>
             <a:endParaRPr lang="en-US" sz="1200" dirty="0"/>
           </a:p>
@@ -11250,7 +11250,7 @@
                   <a:schemeClr val="tx1"/>
                 </a:solidFill>
               </a:rPr>
-              <a:t>Reorder when stock + on order ≤ reorder point</a:t>
+              <a:t>Flags items that will run short</a:t>
             </a:r>
             <a:endParaRPr lang="en-US" sz="1200" dirty="0"/>
           </a:p>
@@ -11268,7 +11268,7 @@
                   <a:schemeClr val="tx1"/>
                 </a:solidFill>
               </a:rPr>
-              <a:t>Quantity rounded to the pack, with a reason</a:t>
+              <a:t>Suggests a quantity, with a reason</a:t>
             </a:r>
             <a:endParaRPr lang="en-US" sz="1200" dirty="0"/>
           </a:p>
@@ -11329,7 +11329,7 @@
                 <a:ea typeface="Cambria" pitchFamily="34" charset="-122"/>
                 <a:cs typeface="Cambria" pitchFamily="34" charset="-120"/>
               </a:rPr>
-              <a:t>Reorder point = lead-time demand + safety stock</a:t>
+              <a:t>Order before it runs out, not after</a:t>
             </a:r>
             <a:endParaRPr lang="en-US" sz="1200" dirty="0"/>
           </a:p>
